--- a/docs/서버실_출입관리_사용자가이드.pptx
+++ b/docs/서버실_출입관리_사용자가이드.pptx
@@ -211,7 +211,7 @@
           <a:p>
             <a:fld id="{8C5151AD-0D66-4B19-8343-39009AB45A99}" type="datetimeFigureOut">
               <a:rPr lang="ko-KR" altLang="en-US" smtClean="0"/>
-              <a:t>2026-06-24</a:t>
+              <a:t>2026-06-26</a:t>
             </a:fld>
             <a:endParaRPr lang="ko-KR" altLang="en-US"/>
           </a:p>
@@ -744,7 +744,7 @@
           <a:p>
             <a:fld id="{5BCAD085-E8A6-8845-BD4E-CB4CCA059FC4}" type="datetimeFigureOut">
               <a:rPr lang="en-US" smtClean="0"/>
-              <a:t>6/24/2026</a:t>
+              <a:t>6/26/2026</a:t>
             </a:fld>
             <a:endParaRPr lang="en-US"/>
           </a:p>
@@ -914,7 +914,7 @@
           <a:p>
             <a:fld id="{5BCAD085-E8A6-8845-BD4E-CB4CCA059FC4}" type="datetimeFigureOut">
               <a:rPr lang="en-US" smtClean="0"/>
-              <a:t>6/24/2026</a:t>
+              <a:t>6/26/2026</a:t>
             </a:fld>
             <a:endParaRPr lang="en-US"/>
           </a:p>
@@ -1094,7 +1094,7 @@
           <a:p>
             <a:fld id="{5BCAD085-E8A6-8845-BD4E-CB4CCA059FC4}" type="datetimeFigureOut">
               <a:rPr lang="en-US" smtClean="0"/>
-              <a:t>6/24/2026</a:t>
+              <a:t>6/26/2026</a:t>
             </a:fld>
             <a:endParaRPr lang="en-US"/>
           </a:p>
@@ -1264,7 +1264,7 @@
           <a:p>
             <a:fld id="{5BCAD085-E8A6-8845-BD4E-CB4CCA059FC4}" type="datetimeFigureOut">
               <a:rPr lang="en-US" smtClean="0"/>
-              <a:t>6/24/2026</a:t>
+              <a:t>6/26/2026</a:t>
             </a:fld>
             <a:endParaRPr lang="en-US"/>
           </a:p>
@@ -1510,7 +1510,7 @@
           <a:p>
             <a:fld id="{5BCAD085-E8A6-8845-BD4E-CB4CCA059FC4}" type="datetimeFigureOut">
               <a:rPr lang="en-US" smtClean="0"/>
-              <a:t>6/24/2026</a:t>
+              <a:t>6/26/2026</a:t>
             </a:fld>
             <a:endParaRPr lang="en-US"/>
           </a:p>
@@ -1798,7 +1798,7 @@
           <a:p>
             <a:fld id="{5BCAD085-E8A6-8845-BD4E-CB4CCA059FC4}" type="datetimeFigureOut">
               <a:rPr lang="en-US" smtClean="0"/>
-              <a:t>6/24/2026</a:t>
+              <a:t>6/26/2026</a:t>
             </a:fld>
             <a:endParaRPr lang="en-US"/>
           </a:p>
@@ -2220,7 +2220,7 @@
           <a:p>
             <a:fld id="{5BCAD085-E8A6-8845-BD4E-CB4CCA059FC4}" type="datetimeFigureOut">
               <a:rPr lang="en-US" smtClean="0"/>
-              <a:t>6/24/2026</a:t>
+              <a:t>6/26/2026</a:t>
             </a:fld>
             <a:endParaRPr lang="en-US"/>
           </a:p>
@@ -2338,7 +2338,7 @@
           <a:p>
             <a:fld id="{5BCAD085-E8A6-8845-BD4E-CB4CCA059FC4}" type="datetimeFigureOut">
               <a:rPr lang="en-US" smtClean="0"/>
-              <a:t>6/24/2026</a:t>
+              <a:t>6/26/2026</a:t>
             </a:fld>
             <a:endParaRPr lang="en-US"/>
           </a:p>
@@ -2433,7 +2433,7 @@
           <a:p>
             <a:fld id="{5BCAD085-E8A6-8845-BD4E-CB4CCA059FC4}" type="datetimeFigureOut">
               <a:rPr lang="en-US" smtClean="0"/>
-              <a:t>6/24/2026</a:t>
+              <a:t>6/26/2026</a:t>
             </a:fld>
             <a:endParaRPr lang="en-US"/>
           </a:p>
@@ -2710,7 +2710,7 @@
           <a:p>
             <a:fld id="{5BCAD085-E8A6-8845-BD4E-CB4CCA059FC4}" type="datetimeFigureOut">
               <a:rPr lang="en-US" smtClean="0"/>
-              <a:t>6/24/2026</a:t>
+              <a:t>6/26/2026</a:t>
             </a:fld>
             <a:endParaRPr lang="en-US"/>
           </a:p>
@@ -2963,7 +2963,7 @@
           <a:p>
             <a:fld id="{5BCAD085-E8A6-8845-BD4E-CB4CCA059FC4}" type="datetimeFigureOut">
               <a:rPr lang="en-US" smtClean="0"/>
-              <a:t>6/24/2026</a:t>
+              <a:t>6/26/2026</a:t>
             </a:fld>
             <a:endParaRPr lang="en-US"/>
           </a:p>
@@ -3176,7 +3176,7 @@
           <a:p>
             <a:fld id="{5BCAD085-E8A6-8845-BD4E-CB4CCA059FC4}" type="datetimeFigureOut">
               <a:rPr lang="en-US" smtClean="0"/>
-              <a:t>6/24/2026</a:t>
+              <a:t>6/26/2026</a:t>
             </a:fld>
             <a:endParaRPr lang="en-US"/>
           </a:p>
@@ -7173,6 +7173,86 @@
           </a:p>
         </p:txBody>
       </p:sp>
+      <p:pic>
+        <p:nvPicPr>
+          <p:cNvPr id="17" name="그림 16"/>
+          <p:cNvPicPr>
+            <a:picLocks noChangeAspect="1"/>
+          </p:cNvPicPr>
+          <p:nvPr/>
+        </p:nvPicPr>
+        <p:blipFill>
+          <a:blip r:embed="rId3"/>
+          <a:stretch>
+            <a:fillRect/>
+          </a:stretch>
+        </p:blipFill>
+        <p:spPr>
+          <a:xfrm>
+            <a:off x="8689520" y="2607436"/>
+            <a:ext cx="2547231" cy="2100348"/>
+          </a:xfrm>
+          <a:prstGeom prst="rect">
+            <a:avLst/>
+          </a:prstGeom>
+        </p:spPr>
+      </p:pic>
+      <p:sp>
+        <p:nvSpPr>
+          <p:cNvPr id="18" name="직사각형 17"/>
+          <p:cNvSpPr/>
+          <p:nvPr/>
+        </p:nvSpPr>
+        <p:spPr>
+          <a:xfrm>
+            <a:off x="9341963" y="3770722"/>
+            <a:ext cx="1168924" cy="219513"/>
+          </a:xfrm>
+          <a:prstGeom prst="rect">
+            <a:avLst/>
+          </a:prstGeom>
+          <a:solidFill>
+            <a:srgbClr val="ECF6FF"/>
+          </a:solidFill>
+          <a:ln>
+            <a:noFill/>
+          </a:ln>
+        </p:spPr>
+        <p:style>
+          <a:lnRef idx="1">
+            <a:schemeClr val="accent1"/>
+          </a:lnRef>
+          <a:fillRef idx="3">
+            <a:schemeClr val="accent1"/>
+          </a:fillRef>
+          <a:effectRef idx="2">
+            <a:schemeClr val="accent1"/>
+          </a:effectRef>
+          <a:fontRef idx="minor">
+            <a:schemeClr val="lt1"/>
+          </a:fontRef>
+        </p:style>
+        <p:txBody>
+          <a:bodyPr rtlCol="0" anchor="ctr"/>
+          <a:lstStyle/>
+          <a:p>
+            <a:pPr algn="ctr"/>
+            <a:r>
+              <a:rPr lang="en-US" altLang="ko-KR" dirty="0" smtClean="0">
+                <a:solidFill>
+                  <a:schemeClr val="tx1"/>
+                </a:solidFill>
+              </a:rPr>
+              <a:t>****</a:t>
+            </a:r>
+            <a:endParaRPr lang="ko-KR" altLang="en-US" dirty="0">
+              <a:solidFill>
+                <a:schemeClr val="tx1"/>
+              </a:solidFill>
+            </a:endParaRPr>
+          </a:p>
+        </p:txBody>
+      </p:sp>
     </p:spTree>
   </p:cSld>
   <p:clrMapOvr>
@@ -7338,7 +7418,7 @@
                 </a:solidFill>
                 <a:latin typeface="맑은 고딕"/>
               </a:rPr>
-              <a:t>출입 현황 모니터링 (/admin)</a:t>
+              <a:t>출입 현황 · 비밀번호 · 공지 관리 (/admin)</a:t>
             </a:r>
           </a:p>
         </p:txBody>
@@ -7476,98 +7556,17 @@
           <a:p>
             <a:pPr algn="l">
               <a:spcAft>
-                <a:spcPts val="900"/>
+                <a:spcPts val="200"/>
               </a:spcAft>
             </a:pPr>
             <a:r>
-              <a:rPr sz="1250" b="0" dirty="0">
-                <a:solidFill>
-                  <a:srgbClr val="6B6A66"/>
-                </a:solidFill>
-                <a:latin typeface="맑은 고딕"/>
-              </a:rPr>
-              <a:t>• </a:t>
-            </a:r>
-            <a:r>
-              <a:rPr sz="1250" b="0" dirty="0" err="1">
-                <a:solidFill>
-                  <a:srgbClr val="6B6A66"/>
-                </a:solidFill>
-                <a:latin typeface="맑은 고딕"/>
-              </a:rPr>
-              <a:t>오늘</a:t>
-            </a:r>
-            <a:r>
-              <a:rPr sz="1250" b="0" dirty="0">
-                <a:solidFill>
-                  <a:srgbClr val="6B6A66"/>
-                </a:solidFill>
-                <a:latin typeface="맑은 고딕"/>
-              </a:rPr>
-              <a:t> </a:t>
-            </a:r>
-            <a:r>
-              <a:rPr sz="1250" b="0" dirty="0" err="1">
-                <a:solidFill>
-                  <a:srgbClr val="6B6A66"/>
-                </a:solidFill>
-                <a:latin typeface="맑은 고딕"/>
-              </a:rPr>
-              <a:t>출입</a:t>
-            </a:r>
-            <a:r>
-              <a:rPr sz="1250" b="0" dirty="0">
-                <a:solidFill>
-                  <a:srgbClr val="6B6A66"/>
-                </a:solidFill>
-                <a:latin typeface="맑은 고딕"/>
-              </a:rPr>
-              <a:t> </a:t>
-            </a:r>
-            <a:r>
-              <a:rPr sz="1250" b="0" dirty="0" err="1">
-                <a:solidFill>
-                  <a:srgbClr val="6B6A66"/>
-                </a:solidFill>
-                <a:latin typeface="맑은 고딕"/>
-              </a:rPr>
-              <a:t>건수</a:t>
-            </a:r>
-            <a:r>
-              <a:rPr sz="1250" b="0" dirty="0">
-                <a:solidFill>
-                  <a:srgbClr val="6B6A66"/>
-                </a:solidFill>
-                <a:latin typeface="맑은 고딕"/>
-              </a:rPr>
-              <a:t> · 총 </a:t>
-            </a:r>
-            <a:r>
-              <a:rPr sz="1250" b="0" dirty="0" err="1">
-                <a:solidFill>
-                  <a:srgbClr val="6B6A66"/>
-                </a:solidFill>
-                <a:latin typeface="맑은 고딕"/>
-              </a:rPr>
-              <a:t>출입</a:t>
-            </a:r>
-            <a:r>
-              <a:rPr sz="1250" b="0" dirty="0">
-                <a:solidFill>
-                  <a:srgbClr val="6B6A66"/>
-                </a:solidFill>
-                <a:latin typeface="맑은 고딕"/>
-              </a:rPr>
-              <a:t> </a:t>
-            </a:r>
-            <a:r>
-              <a:rPr sz="1250" b="0" dirty="0" err="1" smtClean="0">
-                <a:solidFill>
-                  <a:srgbClr val="6B6A66"/>
-                </a:solidFill>
-                <a:latin typeface="맑은 고딕"/>
-              </a:rPr>
-              <a:t>인원</a:t>
+              <a:rPr sz="1250" b="1">
+                <a:solidFill>
+                  <a:srgbClr val="3B6FD4"/>
+                </a:solidFill>
+                <a:latin typeface="맑은 고딕"/>
+              </a:rPr>
+              <a:t>출입 현황 모니터링</a:t>
             </a:r>
             <a:endParaRPr lang="en-US" sz="1250" b="0" dirty="0" smtClean="0">
               <a:solidFill>
@@ -7577,257 +7576,183 @@
             </a:endParaRPr>
           </a:p>
           <a:p>
-            <a:pPr algn="l">
+            <a:pPr>
               <a:spcAft>
-                <a:spcPts val="900"/>
+                <a:spcPts val="300"/>
               </a:spcAft>
             </a:pPr>
             <a:r>
-              <a:rPr sz="1250" b="0" dirty="0" smtClean="0">
-                <a:solidFill>
-                  <a:srgbClr val="6B6A66"/>
-                </a:solidFill>
-                <a:latin typeface="맑은 고딕"/>
-              </a:rPr>
-              <a:t>• </a:t>
-            </a:r>
-            <a:r>
-              <a:rPr sz="1250" b="0" dirty="0" err="1">
-                <a:solidFill>
-                  <a:srgbClr val="6B6A66"/>
-                </a:solidFill>
-                <a:latin typeface="맑은 고딕"/>
-              </a:rPr>
-              <a:t>기간</a:t>
-            </a:r>
-            <a:r>
-              <a:rPr sz="1250" b="0" dirty="0">
-                <a:solidFill>
-                  <a:srgbClr val="6B6A66"/>
-                </a:solidFill>
-                <a:latin typeface="맑은 고딕"/>
-              </a:rPr>
-              <a:t> / </a:t>
-            </a:r>
-            <a:r>
-              <a:rPr sz="1250" b="0" dirty="0" err="1">
-                <a:solidFill>
-                  <a:srgbClr val="6B6A66"/>
-                </a:solidFill>
-                <a:latin typeface="맑은 고딕"/>
-              </a:rPr>
-              <a:t>성명·사번</a:t>
-            </a:r>
-            <a:r>
-              <a:rPr sz="1250" b="0" dirty="0">
-                <a:solidFill>
-                  <a:srgbClr val="6B6A66"/>
-                </a:solidFill>
-                <a:latin typeface="맑은 고딕"/>
-              </a:rPr>
-              <a:t> </a:t>
-            </a:r>
-            <a:r>
-              <a:rPr sz="1250" b="0" dirty="0" err="1">
-                <a:solidFill>
-                  <a:srgbClr val="6B6A66"/>
-                </a:solidFill>
-                <a:latin typeface="맑은 고딕"/>
-              </a:rPr>
-              <a:t>검색</a:t>
-            </a:r>
-            <a:endParaRPr sz="1250" b="0" dirty="0">
-              <a:solidFill>
-                <a:srgbClr val="6B6A66"/>
-              </a:solidFill>
-              <a:latin typeface="맑은 고딕"/>
-            </a:endParaRPr>
-          </a:p>
-          <a:p>
-            <a:pPr algn="l">
+              <a:rPr sz="1200" b="0">
+                <a:solidFill>
+                  <a:srgbClr val="6B6A66"/>
+                </a:solidFill>
+                <a:latin typeface="맑은 고딕"/>
+              </a:rPr>
+              <a:t>• 오늘 출입 건수 · 총 출입 인원</a:t>
+            </a:r>
+          </a:p>
+          <a:p>
+            <a:pPr>
               <a:spcAft>
-                <a:spcPts val="900"/>
+                <a:spcPts val="300"/>
               </a:spcAft>
             </a:pPr>
             <a:r>
-              <a:rPr sz="1250" b="0" dirty="0">
-                <a:solidFill>
-                  <a:srgbClr val="6B6A66"/>
-                </a:solidFill>
-                <a:latin typeface="맑은 고딕"/>
-              </a:rPr>
-              <a:t>• </a:t>
-            </a:r>
-            <a:r>
-              <a:rPr sz="1250" b="0" dirty="0" err="1">
-                <a:solidFill>
-                  <a:srgbClr val="6B6A66"/>
-                </a:solidFill>
-                <a:latin typeface="맑은 고딕"/>
-              </a:rPr>
-              <a:t>출입</a:t>
-            </a:r>
-            <a:r>
-              <a:rPr sz="1250" b="0" dirty="0">
-                <a:solidFill>
-                  <a:srgbClr val="6B6A66"/>
-                </a:solidFill>
-                <a:latin typeface="맑은 고딕"/>
-              </a:rPr>
-              <a:t> </a:t>
-            </a:r>
-            <a:r>
-              <a:rPr sz="1250" b="0" dirty="0" err="1">
-                <a:solidFill>
-                  <a:srgbClr val="6B6A66"/>
-                </a:solidFill>
-                <a:latin typeface="맑은 고딕"/>
-              </a:rPr>
-              <a:t>기록</a:t>
-            </a:r>
-            <a:r>
-              <a:rPr sz="1250" b="0" dirty="0">
-                <a:solidFill>
-                  <a:srgbClr val="6B6A66"/>
-                </a:solidFill>
-                <a:latin typeface="맑은 고딕"/>
-              </a:rPr>
-              <a:t> </a:t>
-            </a:r>
-            <a:r>
-              <a:rPr sz="1250" b="0" dirty="0" err="1">
-                <a:solidFill>
-                  <a:srgbClr val="6B6A66"/>
-                </a:solidFill>
-                <a:latin typeface="맑은 고딕"/>
-              </a:rPr>
-              <a:t>목록</a:t>
-            </a:r>
-            <a:r>
-              <a:rPr sz="1250" b="0" dirty="0">
-                <a:solidFill>
-                  <a:srgbClr val="6B6A66"/>
-                </a:solidFill>
-                <a:latin typeface="맑은 고딕"/>
-              </a:rPr>
-              <a:t>(</a:t>
-            </a:r>
-            <a:r>
-              <a:rPr sz="1250" b="0" dirty="0" err="1">
-                <a:solidFill>
-                  <a:srgbClr val="6B6A66"/>
-                </a:solidFill>
-                <a:latin typeface="맑은 고딕"/>
-              </a:rPr>
-              <a:t>연락처</a:t>
-            </a:r>
-            <a:r>
-              <a:rPr sz="1250" b="0" dirty="0">
-                <a:solidFill>
-                  <a:srgbClr val="6B6A66"/>
-                </a:solidFill>
-                <a:latin typeface="맑은 고딕"/>
-              </a:rPr>
-              <a:t> </a:t>
-            </a:r>
-            <a:r>
-              <a:rPr sz="1250" b="0" dirty="0" err="1">
-                <a:solidFill>
-                  <a:srgbClr val="6B6A66"/>
-                </a:solidFill>
-                <a:latin typeface="맑은 고딕"/>
-              </a:rPr>
-              <a:t>포함</a:t>
-            </a:r>
-            <a:r>
-              <a:rPr sz="1250" b="0" dirty="0">
-                <a:solidFill>
-                  <a:srgbClr val="6B6A66"/>
-                </a:solidFill>
-                <a:latin typeface="맑은 고딕"/>
-              </a:rPr>
-              <a:t>)</a:t>
-            </a:r>
-          </a:p>
-          <a:p>
-            <a:pPr algn="l">
+              <a:rPr sz="1200" b="0">
+                <a:solidFill>
+                  <a:srgbClr val="6B6A66"/>
+                </a:solidFill>
+                <a:latin typeface="맑은 고딕"/>
+              </a:rPr>
+              <a:t>• 기간 / 성명·사번 검색</a:t>
+            </a:r>
+          </a:p>
+          <a:p>
+            <a:pPr>
               <a:spcAft>
-                <a:spcPts val="900"/>
+                <a:spcPts val="300"/>
               </a:spcAft>
             </a:pPr>
             <a:r>
-              <a:rPr sz="1250" b="0" dirty="0">
-                <a:solidFill>
-                  <a:srgbClr val="6B6A66"/>
-                </a:solidFill>
-                <a:latin typeface="맑은 고딕"/>
-              </a:rPr>
-              <a:t>• 30초마다 </a:t>
-            </a:r>
-            <a:r>
-              <a:rPr sz="1250" b="0" dirty="0" err="1">
-                <a:solidFill>
-                  <a:srgbClr val="6B6A66"/>
-                </a:solidFill>
-                <a:latin typeface="맑은 고딕"/>
-              </a:rPr>
-              <a:t>현황</a:t>
-            </a:r>
-            <a:r>
-              <a:rPr sz="1250" b="0" dirty="0">
-                <a:solidFill>
-                  <a:srgbClr val="6B6A66"/>
-                </a:solidFill>
-                <a:latin typeface="맑은 고딕"/>
-              </a:rPr>
-              <a:t> </a:t>
-            </a:r>
-            <a:r>
-              <a:rPr sz="1250" b="0" dirty="0" err="1">
-                <a:solidFill>
-                  <a:srgbClr val="6B6A66"/>
-                </a:solidFill>
-                <a:latin typeface="맑은 고딕"/>
-              </a:rPr>
-              <a:t>자동</a:t>
-            </a:r>
-            <a:r>
-              <a:rPr sz="1250" b="0" dirty="0">
-                <a:solidFill>
-                  <a:srgbClr val="6B6A66"/>
-                </a:solidFill>
-                <a:latin typeface="맑은 고딕"/>
-              </a:rPr>
-              <a:t> </a:t>
-            </a:r>
-            <a:r>
-              <a:rPr sz="1250" b="0" dirty="0" err="1">
-                <a:solidFill>
-                  <a:srgbClr val="6B6A66"/>
-                </a:solidFill>
-                <a:latin typeface="맑은 고딕"/>
-              </a:rPr>
-              <a:t>갱신</a:t>
-            </a:r>
-            <a:endParaRPr sz="1250" b="0" dirty="0">
-              <a:solidFill>
-                <a:srgbClr val="6B6A66"/>
-              </a:solidFill>
-              <a:latin typeface="맑은 고딕"/>
-            </a:endParaRPr>
+              <a:rPr sz="1200" b="0">
+                <a:solidFill>
+                  <a:srgbClr val="6B6A66"/>
+                </a:solidFill>
+                <a:latin typeface="맑은 고딕"/>
+              </a:rPr>
+              <a:t>• 출입 기록(연락처 복호화 표시)</a:t>
+            </a:r>
+          </a:p>
+          <a:p>
+            <a:pPr>
+              <a:spcAft>
+                <a:spcPts val="300"/>
+              </a:spcAft>
+            </a:pPr>
+            <a:r>
+              <a:rPr sz="1200" b="0">
+                <a:solidFill>
+                  <a:srgbClr val="6B6A66"/>
+                </a:solidFill>
+                <a:latin typeface="맑은 고딕"/>
+              </a:rPr>
+              <a:t>• 30초마다 현황 자동 갱신</a:t>
+            </a:r>
+          </a:p>
+          <a:p>
+            <a:pPr>
+              <a:spcBef>
+                <a:spcPts val="700"/>
+              </a:spcBef>
+              <a:spcAft>
+                <a:spcPts val="200"/>
+              </a:spcAft>
+            </a:pPr>
+            <a:r>
+              <a:rPr sz="1250" b="1">
+                <a:solidFill>
+                  <a:srgbClr val="3B6FD4"/>
+                </a:solidFill>
+                <a:latin typeface="맑은 고딕"/>
+              </a:rPr>
+              <a:t>⚙ 설정 패널 (접기/펼치기)</a:t>
+            </a:r>
+          </a:p>
+          <a:p>
+            <a:pPr>
+              <a:spcAft>
+                <a:spcPts val="300"/>
+              </a:spcAft>
+            </a:pPr>
+            <a:r>
+              <a:rPr sz="1200" b="0">
+                <a:solidFill>
+                  <a:srgbClr val="6B6A66"/>
+                </a:solidFill>
+                <a:latin typeface="맑은 고딕"/>
+              </a:rPr>
+              <a:t>• 서버실 출입 비밀번호 변경</a:t>
+            </a:r>
+          </a:p>
+          <a:p>
+            <a:pPr>
+              <a:spcAft>
+                <a:spcPts val="300"/>
+              </a:spcAft>
+            </a:pPr>
+            <a:r>
+              <a:rPr sz="1200" b="0">
+                <a:solidFill>
+                  <a:srgbClr val="6B6A66"/>
+                </a:solidFill>
+                <a:latin typeface="맑은 고딕"/>
+              </a:rPr>
+              <a:t>• 마지막 변경일 · 경과일수 표시</a:t>
+            </a:r>
+          </a:p>
+          <a:p>
+            <a:pPr>
+              <a:spcAft>
+                <a:spcPts val="300"/>
+              </a:spcAft>
+            </a:pPr>
+            <a:r>
+              <a:rPr sz="1200" b="0">
+                <a:solidFill>
+                  <a:srgbClr val="6B6A66"/>
+                </a:solidFill>
+                <a:latin typeface="맑은 고딕"/>
+              </a:rPr>
+              <a:t>• 공지사항 작성·삭제 → 사용자 배너</a:t>
+            </a:r>
+          </a:p>
+          <a:p>
+            <a:pPr>
+              <a:spcBef>
+                <a:spcPts val="700"/>
+              </a:spcBef>
+              <a:spcAft>
+                <a:spcPts val="200"/>
+              </a:spcAft>
+            </a:pPr>
+            <a:r>
+              <a:rPr sz="1250" b="1">
+                <a:solidFill>
+                  <a:srgbClr val="3B6FD4"/>
+                </a:solidFill>
+                <a:latin typeface="맑은 고딕"/>
+              </a:rPr>
+              <a:t>접근 권한</a:t>
+            </a:r>
+          </a:p>
+          <a:p>
+            <a:pPr>
+              <a:spcAft>
+                <a:spcPts val="300"/>
+              </a:spcAft>
+            </a:pPr>
+            <a:r>
+              <a:rPr sz="1200" b="0">
+                <a:solidFill>
+                  <a:srgbClr val="6B6A66"/>
+                </a:solidFill>
+                <a:latin typeface="맑은 고딕"/>
+              </a:rPr>
+              <a:t>• 허용된 사번만 대시보드 접근</a:t>
+            </a:r>
           </a:p>
         </p:txBody>
       </p:sp>
       <p:pic>
         <p:nvPicPr>
-          <p:cNvPr id="11" name="Picture 10" descr="guide_04_admin.png"/>
+          <p:cNvPr id="13" name="Picture 10" descr="admin_new.png"/>
           <p:cNvPicPr>
             <a:picLocks noChangeAspect="1"/>
           </p:cNvPicPr>
           <p:nvPr/>
         </p:nvPicPr>
         <p:blipFill>
-          <a:blip r:embed="rId3"/>
+          <a:blip r:embed="rId4"/>
           <a:stretch>
             <a:fillRect/>
           </a:stretch>
@@ -7840,11 +7765,6 @@
           <a:prstGeom prst="rect">
             <a:avLst/>
           </a:prstGeom>
-          <a:ln w="22225">
-            <a:solidFill>
-              <a:srgbClr val="222B45"/>
-            </a:solidFill>
-          </a:ln>
         </p:spPr>
       </p:pic>
       <p:sp>
